--- a/data-mart-platform-v3.pptx
+++ b/data-mart-platform-v3.pptx
@@ -674,7 +674,7 @@
         </p:nvSpPr>
         <p:spPr>
           <a:xfrm>
-            <a:off x="1005842" y="4864890"/>
+            <a:off x="583811" y="4817998"/>
             <a:ext cx="1385888" cy="1371600"/>
           </a:xfrm>
           <a:prstGeom prst="roundRect">
@@ -708,7 +708,7 @@
         </p:nvSpPr>
         <p:spPr>
           <a:xfrm>
-            <a:off x="2651760" y="290348"/>
+            <a:off x="2229729" y="243456"/>
             <a:ext cx="7040880" cy="5623560"/>
           </a:xfrm>
           <a:prstGeom prst="roundRect">
@@ -742,7 +742,7 @@
         </p:nvSpPr>
         <p:spPr>
           <a:xfrm>
-            <a:off x="4297680" y="297180"/>
+            <a:off x="3875649" y="250288"/>
             <a:ext cx="3931920" cy="320040"/>
           </a:xfrm>
           <a:prstGeom prst="rect">
@@ -781,7 +781,7 @@
         </p:nvSpPr>
         <p:spPr>
           <a:xfrm>
-            <a:off x="2834640" y="621792"/>
+            <a:off x="2412609" y="574900"/>
             <a:ext cx="6355080" cy="1097280"/>
           </a:xfrm>
           <a:prstGeom prst="rect">
@@ -813,7 +813,7 @@
         </p:nvSpPr>
         <p:spPr>
           <a:xfrm>
-            <a:off x="2834640" y="658368"/>
+            <a:off x="2412609" y="611476"/>
             <a:ext cx="6355080" cy="201168"/>
           </a:xfrm>
           <a:prstGeom prst="rect">
@@ -852,7 +852,7 @@
         </p:nvSpPr>
         <p:spPr>
           <a:xfrm>
-            <a:off x="2971800" y="914400"/>
+            <a:off x="2549769" y="867508"/>
             <a:ext cx="1444752" cy="658368"/>
           </a:xfrm>
           <a:prstGeom prst="rect">
@@ -884,7 +884,7 @@
         </p:nvSpPr>
         <p:spPr>
           <a:xfrm>
-            <a:off x="3154769" y="950404"/>
+            <a:off x="2732738" y="903512"/>
             <a:ext cx="1134529" cy="190498"/>
           </a:xfrm>
           <a:prstGeom prst="rect">
@@ -937,7 +937,7 @@
         </p:nvSpPr>
         <p:spPr>
           <a:xfrm>
-            <a:off x="4526280" y="914400"/>
+            <a:off x="4104249" y="867508"/>
             <a:ext cx="1444752" cy="658368"/>
           </a:xfrm>
           <a:prstGeom prst="rect">
@@ -969,7 +969,7 @@
         </p:nvSpPr>
         <p:spPr>
           <a:xfrm>
-            <a:off x="4918166" y="932688"/>
+            <a:off x="4496135" y="885796"/>
             <a:ext cx="819477" cy="194852"/>
           </a:xfrm>
           <a:prstGeom prst="rect">
@@ -1023,7 +1023,7 @@
         </p:nvSpPr>
         <p:spPr>
           <a:xfrm>
-            <a:off x="6080760" y="914400"/>
+            <a:off x="5658729" y="867508"/>
             <a:ext cx="1444752" cy="658368"/>
           </a:xfrm>
           <a:prstGeom prst="rect">
@@ -1055,7 +1055,7 @@
         </p:nvSpPr>
         <p:spPr>
           <a:xfrm>
-            <a:off x="6414516" y="947928"/>
+            <a:off x="5992485" y="901036"/>
             <a:ext cx="987552" cy="164592"/>
           </a:xfrm>
           <a:prstGeom prst="rect">
@@ -1109,7 +1109,7 @@
         </p:nvSpPr>
         <p:spPr>
           <a:xfrm>
-            <a:off x="7635240" y="914400"/>
+            <a:off x="7213209" y="867508"/>
             <a:ext cx="1444752" cy="658368"/>
           </a:xfrm>
           <a:prstGeom prst="rect">
@@ -1141,7 +1141,7 @@
         </p:nvSpPr>
         <p:spPr>
           <a:xfrm>
-            <a:off x="7882890" y="913808"/>
+            <a:off x="7460859" y="866916"/>
             <a:ext cx="1175439" cy="238928"/>
           </a:xfrm>
           <a:prstGeom prst="rect">
@@ -1195,7 +1195,7 @@
         </p:nvSpPr>
         <p:spPr>
           <a:xfrm>
-            <a:off x="2834640" y="1965960"/>
+            <a:off x="2412609" y="1919068"/>
             <a:ext cx="1645920" cy="1234440"/>
           </a:xfrm>
           <a:prstGeom prst="roundRect">
@@ -1229,7 +1229,7 @@
         </p:nvSpPr>
         <p:spPr>
           <a:xfrm>
-            <a:off x="2889504" y="2029968"/>
+            <a:off x="2467473" y="1983076"/>
             <a:ext cx="1536192" cy="411480"/>
           </a:xfrm>
           <a:prstGeom prst="rect">
@@ -1285,7 +1285,7 @@
         </p:nvSpPr>
         <p:spPr>
           <a:xfrm>
-            <a:off x="4709160" y="1920240"/>
+            <a:off x="4287129" y="1873348"/>
             <a:ext cx="1828800" cy="1417320"/>
           </a:xfrm>
           <a:prstGeom prst="roundRect">
@@ -1319,7 +1319,7 @@
         </p:nvSpPr>
         <p:spPr>
           <a:xfrm>
-            <a:off x="4754880" y="1993392"/>
+            <a:off x="4332849" y="1946500"/>
             <a:ext cx="1737360" cy="228600"/>
           </a:xfrm>
           <a:prstGeom prst="rect">
@@ -1358,7 +1358,7 @@
         </p:nvSpPr>
         <p:spPr>
           <a:xfrm>
-            <a:off x="6903720" y="1920240"/>
+            <a:off x="6481689" y="1873348"/>
             <a:ext cx="1325880" cy="1463040"/>
           </a:xfrm>
           <a:prstGeom prst="roundRect">
@@ -1392,7 +1392,7 @@
         </p:nvSpPr>
         <p:spPr>
           <a:xfrm>
-            <a:off x="6972299" y="1894401"/>
+            <a:off x="6550268" y="1847509"/>
             <a:ext cx="1234440" cy="457200"/>
           </a:xfrm>
           <a:prstGeom prst="rect">
@@ -1448,7 +1448,7 @@
         </p:nvSpPr>
         <p:spPr>
           <a:xfrm>
-            <a:off x="4709160" y="3611880"/>
+            <a:off x="4287129" y="3564988"/>
             <a:ext cx="3520440" cy="1234440"/>
           </a:xfrm>
           <a:prstGeom prst="roundRect">
@@ -1482,7 +1482,7 @@
         </p:nvSpPr>
         <p:spPr>
           <a:xfrm>
-            <a:off x="4709160" y="3657600"/>
+            <a:off x="4287129" y="3610708"/>
             <a:ext cx="3520440" cy="201168"/>
           </a:xfrm>
           <a:prstGeom prst="rect">
@@ -1521,7 +1521,7 @@
         </p:nvSpPr>
         <p:spPr>
           <a:xfrm>
-            <a:off x="4846320" y="3931920"/>
+            <a:off x="4424289" y="3885028"/>
             <a:ext cx="1005840" cy="777240"/>
           </a:xfrm>
           <a:prstGeom prst="roundRect">
@@ -1555,7 +1555,7 @@
         </p:nvSpPr>
         <p:spPr>
           <a:xfrm>
-            <a:off x="4823461" y="3959352"/>
+            <a:off x="4401430" y="3912460"/>
             <a:ext cx="1005840" cy="228600"/>
           </a:xfrm>
           <a:prstGeom prst="rect">
@@ -1594,7 +1594,7 @@
         </p:nvSpPr>
         <p:spPr>
           <a:xfrm>
-            <a:off x="5989320" y="3931920"/>
+            <a:off x="5567289" y="3885028"/>
             <a:ext cx="1005840" cy="777240"/>
           </a:xfrm>
           <a:prstGeom prst="roundRect">
@@ -1628,7 +1628,7 @@
         </p:nvSpPr>
         <p:spPr>
           <a:xfrm>
-            <a:off x="5989320" y="3986784"/>
+            <a:off x="5567289" y="3939892"/>
             <a:ext cx="1005840" cy="228600"/>
           </a:xfrm>
           <a:prstGeom prst="rect">
@@ -1667,7 +1667,7 @@
         </p:nvSpPr>
         <p:spPr>
           <a:xfrm>
-            <a:off x="7132320" y="3931920"/>
+            <a:off x="6710289" y="3885028"/>
             <a:ext cx="1005840" cy="777240"/>
           </a:xfrm>
           <a:prstGeom prst="roundRect">
@@ -1701,7 +1701,7 @@
         </p:nvSpPr>
         <p:spPr>
           <a:xfrm>
-            <a:off x="7132320" y="3986784"/>
+            <a:off x="6710289" y="3939892"/>
             <a:ext cx="1005840" cy="228600"/>
           </a:xfrm>
           <a:prstGeom prst="rect">
@@ -1740,7 +1740,7 @@
         </p:nvSpPr>
         <p:spPr>
           <a:xfrm>
-            <a:off x="8503919" y="1924811"/>
+            <a:off x="8081888" y="1877919"/>
             <a:ext cx="1097280" cy="3154680"/>
           </a:xfrm>
           <a:prstGeom prst="roundRect">
@@ -1774,7 +1774,7 @@
         </p:nvSpPr>
         <p:spPr>
           <a:xfrm>
-            <a:off x="8577071" y="2011680"/>
+            <a:off x="8155040" y="1964788"/>
             <a:ext cx="950976" cy="2976371"/>
           </a:xfrm>
           <a:prstGeom prst="roundRect">
@@ -1808,7 +1808,7 @@
         </p:nvSpPr>
         <p:spPr>
           <a:xfrm>
-            <a:off x="8625840" y="2382012"/>
+            <a:off x="8203809" y="2335120"/>
             <a:ext cx="914400" cy="201168"/>
           </a:xfrm>
           <a:prstGeom prst="rect">
@@ -1847,7 +1847,7 @@
         </p:nvSpPr>
         <p:spPr>
           <a:xfrm>
-            <a:off x="8655416" y="3356987"/>
+            <a:off x="8233385" y="3310095"/>
             <a:ext cx="731520" cy="0"/>
           </a:xfrm>
           <a:prstGeom prst="line">
@@ -1877,7 +1877,7 @@
         </p:nvSpPr>
         <p:spPr>
           <a:xfrm>
-            <a:off x="2697480" y="6070961"/>
+            <a:off x="2275449" y="6024069"/>
             <a:ext cx="6995160" cy="640080"/>
           </a:xfrm>
           <a:prstGeom prst="roundRect">
@@ -1911,8 +1911,8 @@
         </p:nvSpPr>
         <p:spPr>
           <a:xfrm>
-            <a:off x="3566160" y="6125282"/>
-            <a:ext cx="5394960" cy="201168"/>
+            <a:off x="1429629" y="6076005"/>
+            <a:ext cx="2514600" cy="238941"/>
           </a:xfrm>
           <a:prstGeom prst="rect">
             <a:avLst/>
@@ -1950,7 +1950,7 @@
         </p:nvSpPr>
         <p:spPr>
           <a:xfrm>
-            <a:off x="1325880" y="1097280"/>
+            <a:off x="903849" y="1050388"/>
             <a:ext cx="1051560" cy="3291840"/>
           </a:xfrm>
           <a:prstGeom prst="roundRect">
@@ -1984,7 +1984,7 @@
         </p:nvSpPr>
         <p:spPr>
           <a:xfrm>
-            <a:off x="1353312" y="1188720"/>
+            <a:off x="931281" y="1141828"/>
             <a:ext cx="996696" cy="365760"/>
           </a:xfrm>
           <a:prstGeom prst="rect">
@@ -2040,7 +2040,7 @@
         </p:nvSpPr>
         <p:spPr>
           <a:xfrm>
-            <a:off x="1372223" y="4000500"/>
+            <a:off x="950192" y="3953608"/>
             <a:ext cx="960120" cy="320040"/>
           </a:xfrm>
           <a:prstGeom prst="rect">
@@ -2096,7 +2096,7 @@
         </p:nvSpPr>
         <p:spPr>
           <a:xfrm>
-            <a:off x="1070611" y="2517650"/>
+            <a:off x="648580" y="2470758"/>
             <a:ext cx="1601724" cy="320040"/>
           </a:xfrm>
           <a:prstGeom prst="rect">
@@ -2150,7 +2150,7 @@
         </p:nvSpPr>
         <p:spPr>
           <a:xfrm>
-            <a:off x="1355288" y="3291840"/>
+            <a:off x="933257" y="3244948"/>
             <a:ext cx="960120" cy="320040"/>
           </a:xfrm>
           <a:prstGeom prst="rect">
@@ -2189,7 +2189,7 @@
         </p:nvSpPr>
         <p:spPr>
           <a:xfrm>
-            <a:off x="10332720" y="5486400"/>
+            <a:off x="9910689" y="5439508"/>
             <a:ext cx="1737360" cy="1188720"/>
           </a:xfrm>
           <a:prstGeom prst="roundRect">
@@ -2223,7 +2223,7 @@
         </p:nvSpPr>
         <p:spPr>
           <a:xfrm>
-            <a:off x="10442448" y="5559552"/>
+            <a:off x="10020417" y="5512660"/>
             <a:ext cx="914400" cy="182880"/>
           </a:xfrm>
           <a:prstGeom prst="rect">
@@ -2262,7 +2262,7 @@
         </p:nvSpPr>
         <p:spPr>
           <a:xfrm>
-            <a:off x="10442448" y="5888736"/>
+            <a:off x="10020417" y="5841844"/>
             <a:ext cx="274320" cy="0"/>
           </a:xfrm>
           <a:prstGeom prst="line">
@@ -2293,7 +2293,7 @@
         </p:nvSpPr>
         <p:spPr>
           <a:xfrm>
-            <a:off x="10789920" y="5797296"/>
+            <a:off x="10367889" y="5750404"/>
             <a:ext cx="1234440" cy="182880"/>
           </a:xfrm>
           <a:prstGeom prst="rect">
@@ -2332,7 +2332,7 @@
         </p:nvSpPr>
         <p:spPr>
           <a:xfrm>
-            <a:off x="10442448" y="6089904"/>
+            <a:off x="10020417" y="6043012"/>
             <a:ext cx="274320" cy="0"/>
           </a:xfrm>
           <a:prstGeom prst="line">
@@ -2362,7 +2362,7 @@
         </p:nvSpPr>
         <p:spPr>
           <a:xfrm>
-            <a:off x="10789920" y="5998464"/>
+            <a:off x="10367889" y="5951572"/>
             <a:ext cx="1261872" cy="182880"/>
           </a:xfrm>
           <a:prstGeom prst="rect">
@@ -2401,7 +2401,7 @@
         </p:nvSpPr>
         <p:spPr>
           <a:xfrm>
-            <a:off x="10442448" y="6291072"/>
+            <a:off x="10020417" y="6244180"/>
             <a:ext cx="274320" cy="0"/>
           </a:xfrm>
           <a:prstGeom prst="line">
@@ -2432,7 +2432,7 @@
         </p:nvSpPr>
         <p:spPr>
           <a:xfrm>
-            <a:off x="10789920" y="6199632"/>
+            <a:off x="10367889" y="6152740"/>
             <a:ext cx="1261872" cy="182880"/>
           </a:xfrm>
           <a:prstGeom prst="rect">
@@ -2471,7 +2471,7 @@
         </p:nvSpPr>
         <p:spPr>
           <a:xfrm>
-            <a:off x="2377440" y="4114800"/>
+            <a:off x="1955409" y="4067908"/>
             <a:ext cx="457200" cy="0"/>
           </a:xfrm>
           <a:prstGeom prst="line">
@@ -2502,7 +2502,7 @@
         </p:nvSpPr>
         <p:spPr>
           <a:xfrm>
-            <a:off x="6537960" y="2651760"/>
+            <a:off x="6115929" y="2604868"/>
             <a:ext cx="365760" cy="0"/>
           </a:xfrm>
           <a:prstGeom prst="line">
@@ -2534,7 +2534,7 @@
         </p:nvSpPr>
         <p:spPr>
           <a:xfrm>
-            <a:off x="8229600" y="2651760"/>
+            <a:off x="7807569" y="2604868"/>
             <a:ext cx="274320" cy="0"/>
           </a:xfrm>
           <a:prstGeom prst="line">
@@ -2565,7 +2565,7 @@
         </p:nvSpPr>
         <p:spPr>
           <a:xfrm>
-            <a:off x="8229600" y="4206240"/>
+            <a:off x="7807569" y="4159348"/>
             <a:ext cx="274320" cy="0"/>
           </a:xfrm>
           <a:prstGeom prst="line">
@@ -2597,7 +2597,7 @@
         </p:nvSpPr>
         <p:spPr>
           <a:xfrm>
-            <a:off x="9692640" y="2194560"/>
+            <a:off x="9270609" y="2147668"/>
             <a:ext cx="1234440" cy="0"/>
           </a:xfrm>
           <a:prstGeom prst="line">
@@ -2628,7 +2628,7 @@
         </p:nvSpPr>
         <p:spPr>
           <a:xfrm>
-            <a:off x="9692640" y="3291840"/>
+            <a:off x="9270609" y="3244948"/>
             <a:ext cx="1234440" cy="0"/>
           </a:xfrm>
           <a:prstGeom prst="line">
@@ -2659,7 +2659,7 @@
         </p:nvSpPr>
         <p:spPr>
           <a:xfrm>
-            <a:off x="9692640" y="4389120"/>
+            <a:off x="9270609" y="4342228"/>
             <a:ext cx="1234440" cy="0"/>
           </a:xfrm>
           <a:prstGeom prst="line">
@@ -2690,7 +2690,7 @@
         </p:nvSpPr>
         <p:spPr>
           <a:xfrm flipH="1" flipV="1">
-            <a:off x="2350008" y="1591056"/>
+            <a:off x="1927977" y="1544164"/>
             <a:ext cx="457201" cy="0"/>
           </a:xfrm>
           <a:prstGeom prst="line">
@@ -2721,7 +2721,7 @@
         </p:nvSpPr>
         <p:spPr>
           <a:xfrm flipH="1" flipV="1">
-            <a:off x="6719758" y="1719072"/>
+            <a:off x="6297727" y="1672180"/>
             <a:ext cx="0" cy="1863732"/>
           </a:xfrm>
           <a:prstGeom prst="line">
@@ -2752,7 +2752,7 @@
         </p:nvSpPr>
         <p:spPr>
           <a:xfrm>
-            <a:off x="5394960" y="3337560"/>
+            <a:off x="4972929" y="3290668"/>
             <a:ext cx="0" cy="274320"/>
           </a:xfrm>
           <a:prstGeom prst="line">
@@ -2784,7 +2784,7 @@
         </p:nvSpPr>
         <p:spPr>
           <a:xfrm>
-            <a:off x="6217920" y="3337560"/>
+            <a:off x="5795889" y="3290668"/>
             <a:ext cx="0" cy="274320"/>
           </a:xfrm>
           <a:prstGeom prst="line">
@@ -2816,7 +2816,7 @@
         </p:nvSpPr>
         <p:spPr>
           <a:xfrm>
-            <a:off x="7589520" y="3383280"/>
+            <a:off x="7167489" y="3336388"/>
             <a:ext cx="0" cy="228600"/>
           </a:xfrm>
           <a:prstGeom prst="line">
@@ -2847,7 +2847,7 @@
         </p:nvSpPr>
         <p:spPr>
           <a:xfrm>
-            <a:off x="5349240" y="5468112"/>
+            <a:off x="4927209" y="5421220"/>
             <a:ext cx="4523537" cy="22856"/>
           </a:xfrm>
           <a:prstGeom prst="line">
@@ -2877,7 +2877,7 @@
         </p:nvSpPr>
         <p:spPr>
           <a:xfrm>
-            <a:off x="8549640" y="534800"/>
+            <a:off x="8127609" y="487908"/>
             <a:ext cx="960120" cy="274320"/>
           </a:xfrm>
           <a:prstGeom prst="roundRect">
@@ -2930,7 +2930,7 @@
         </p:nvSpPr>
         <p:spPr>
           <a:xfrm>
-            <a:off x="9854945" y="1211589"/>
+            <a:off x="9432914" y="1164697"/>
             <a:ext cx="1324" cy="4274806"/>
           </a:xfrm>
           <a:prstGeom prst="line">
@@ -2974,7 +2974,7 @@
         </p:blipFill>
         <p:spPr>
           <a:xfrm>
-            <a:off x="6263640" y="3066615"/>
+            <a:off x="5841609" y="3019723"/>
             <a:ext cx="241590" cy="241590"/>
           </a:xfrm>
           <a:prstGeom prst="rect">
@@ -3004,7 +3004,7 @@
         </p:blipFill>
         <p:spPr>
           <a:xfrm>
-            <a:off x="4208584" y="2934791"/>
+            <a:off x="3786553" y="2887899"/>
             <a:ext cx="217112" cy="217112"/>
           </a:xfrm>
           <a:prstGeom prst="rect">
@@ -3034,7 +3034,7 @@
         </p:blipFill>
         <p:spPr>
           <a:xfrm>
-            <a:off x="7926814" y="3053443"/>
+            <a:off x="7504783" y="3006551"/>
             <a:ext cx="285532" cy="278429"/>
           </a:xfrm>
           <a:prstGeom prst="rect">
@@ -3064,7 +3064,7 @@
         </p:blipFill>
         <p:spPr>
           <a:xfrm>
-            <a:off x="5542814" y="4416551"/>
+            <a:off x="5120783" y="4369659"/>
             <a:ext cx="323522" cy="323522"/>
           </a:xfrm>
           <a:prstGeom prst="rect">
@@ -3094,7 +3094,7 @@
         </p:blipFill>
         <p:spPr>
           <a:xfrm>
-            <a:off x="6719758" y="4413393"/>
+            <a:off x="6297727" y="4366501"/>
             <a:ext cx="266700" cy="266700"/>
           </a:xfrm>
           <a:prstGeom prst="rect">
@@ -3124,7 +3124,7 @@
         </p:blipFill>
         <p:spPr>
           <a:xfrm flipH="1">
-            <a:off x="7885462" y="4444784"/>
+            <a:off x="7463431" y="4397892"/>
             <a:ext cx="228602" cy="228602"/>
           </a:xfrm>
           <a:prstGeom prst="rect">
@@ -3160,7 +3160,7 @@
         </p:blipFill>
         <p:spPr>
           <a:xfrm>
-            <a:off x="4120790" y="1325879"/>
+            <a:off x="3698759" y="1278987"/>
             <a:ext cx="268329" cy="268329"/>
           </a:xfrm>
           <a:prstGeom prst="rect">
@@ -3196,7 +3196,7 @@
         </p:blipFill>
         <p:spPr>
           <a:xfrm>
-            <a:off x="5688829" y="1319732"/>
+            <a:off x="5266798" y="1272840"/>
             <a:ext cx="268329" cy="268329"/>
           </a:xfrm>
           <a:prstGeom prst="rect">
@@ -3232,7 +3232,7 @@
         </p:blipFill>
         <p:spPr>
           <a:xfrm>
-            <a:off x="7239210" y="1322727"/>
+            <a:off x="6817179" y="1275835"/>
             <a:ext cx="268329" cy="268329"/>
           </a:xfrm>
           <a:prstGeom prst="rect">
@@ -3268,7 +3268,7 @@
         </p:blipFill>
         <p:spPr>
           <a:xfrm>
-            <a:off x="8782523" y="1315036"/>
+            <a:off x="8360492" y="1268144"/>
             <a:ext cx="268329" cy="268329"/>
           </a:xfrm>
           <a:prstGeom prst="rect">
@@ -3290,7 +3290,7 @@
         </p:nvSpPr>
         <p:spPr>
           <a:xfrm flipV="1">
-            <a:off x="5349240" y="4719908"/>
+            <a:off x="4927209" y="4673016"/>
             <a:ext cx="0" cy="748204"/>
           </a:xfrm>
           <a:prstGeom prst="line">
@@ -3327,7 +3327,7 @@
         </p:nvSpPr>
         <p:spPr>
           <a:xfrm flipV="1">
-            <a:off x="6492240" y="4719908"/>
+            <a:off x="6070209" y="4673016"/>
             <a:ext cx="0" cy="748204"/>
           </a:xfrm>
           <a:prstGeom prst="line">
@@ -3364,7 +3364,7 @@
         </p:nvSpPr>
         <p:spPr>
           <a:xfrm flipV="1">
-            <a:off x="7635240" y="4709160"/>
+            <a:off x="7213209" y="4662268"/>
             <a:ext cx="0" cy="748204"/>
           </a:xfrm>
           <a:prstGeom prst="line">
@@ -3409,7 +3409,7 @@
         </p:blipFill>
         <p:spPr>
           <a:xfrm>
-            <a:off x="9356687" y="6382512"/>
+            <a:off x="8934656" y="6335620"/>
             <a:ext cx="275665" cy="275665"/>
           </a:xfrm>
           <a:prstGeom prst="rect">
@@ -3431,7 +3431,7 @@
         </p:nvSpPr>
         <p:spPr>
           <a:xfrm flipH="1">
-            <a:off x="5099031" y="4719909"/>
+            <a:off x="4677000" y="4673017"/>
             <a:ext cx="21608" cy="1340303"/>
           </a:xfrm>
           <a:prstGeom prst="line">
@@ -3468,7 +3468,7 @@
         </p:nvSpPr>
         <p:spPr>
           <a:xfrm flipV="1">
-            <a:off x="6263640" y="4727447"/>
+            <a:off x="5841609" y="4680555"/>
             <a:ext cx="15236" cy="1343513"/>
           </a:xfrm>
           <a:prstGeom prst="line">
@@ -3505,7 +3505,7 @@
         </p:nvSpPr>
         <p:spPr>
           <a:xfrm flipH="1">
-            <a:off x="7489504" y="4730658"/>
+            <a:off x="7067473" y="4683766"/>
             <a:ext cx="21608" cy="1340303"/>
           </a:xfrm>
           <a:prstGeom prst="line">
@@ -3542,7 +3542,7 @@
         </p:nvSpPr>
         <p:spPr>
           <a:xfrm>
-            <a:off x="8595359" y="3874551"/>
+            <a:off x="8173328" y="3827659"/>
             <a:ext cx="914400" cy="201168"/>
           </a:xfrm>
           <a:prstGeom prst="rect">
@@ -3587,7 +3587,7 @@
         </p:nvSpPr>
         <p:spPr>
           <a:xfrm>
-            <a:off x="3967308" y="1830581"/>
+            <a:off x="3545277" y="1783689"/>
             <a:ext cx="612648" cy="246888"/>
           </a:xfrm>
           <a:prstGeom prst="roundRect">
@@ -3640,7 +3640,7 @@
         </p:nvSpPr>
         <p:spPr>
           <a:xfrm>
-            <a:off x="7764259" y="3523772"/>
+            <a:off x="7342228" y="3476880"/>
             <a:ext cx="612648" cy="246888"/>
           </a:xfrm>
           <a:prstGeom prst="roundRect">
@@ -3693,7 +3693,7 @@
         </p:nvSpPr>
         <p:spPr>
           <a:xfrm>
-            <a:off x="1391413" y="1815845"/>
+            <a:off x="969382" y="1768953"/>
             <a:ext cx="960120" cy="320040"/>
           </a:xfrm>
           <a:prstGeom prst="rect">
@@ -3744,7 +3744,7 @@
         </p:blipFill>
         <p:spPr>
           <a:xfrm>
-            <a:off x="9218530" y="4648555"/>
+            <a:off x="8796499" y="4601663"/>
             <a:ext cx="317771" cy="317771"/>
           </a:xfrm>
           <a:prstGeom prst="rect">
@@ -3774,7 +3774,7 @@
         </p:blipFill>
         <p:spPr>
           <a:xfrm>
-            <a:off x="9224560" y="3081842"/>
+            <a:off x="8802529" y="3034950"/>
             <a:ext cx="201168" cy="201168"/>
           </a:xfrm>
           <a:prstGeom prst="rect">
@@ -3790,7 +3790,7 @@
         </p:nvSpPr>
         <p:spPr>
           <a:xfrm flipH="1">
-            <a:off x="1242533" y="6261380"/>
+            <a:off x="820502" y="6214488"/>
             <a:ext cx="2765" cy="254912"/>
           </a:xfrm>
           <a:prstGeom prst="line">
@@ -3820,7 +3820,7 @@
         </p:nvSpPr>
         <p:spPr>
           <a:xfrm>
-            <a:off x="1244162" y="6508470"/>
+            <a:off x="822131" y="6461578"/>
             <a:ext cx="1453317" cy="7817"/>
           </a:xfrm>
           <a:prstGeom prst="line">
@@ -3851,7 +3851,7 @@
         </p:nvSpPr>
         <p:spPr>
           <a:xfrm>
-            <a:off x="4590288" y="3035808"/>
+            <a:off x="4168257" y="2988916"/>
             <a:ext cx="0" cy="3035808"/>
           </a:xfrm>
           <a:prstGeom prst="line">
@@ -3881,7 +3881,7 @@
         </p:nvSpPr>
         <p:spPr>
           <a:xfrm>
-            <a:off x="4480560" y="3035808"/>
+            <a:off x="4058529" y="2988916"/>
             <a:ext cx="109728" cy="0"/>
           </a:xfrm>
           <a:prstGeom prst="line">
@@ -3912,7 +3912,7 @@
         </p:nvSpPr>
         <p:spPr>
           <a:xfrm>
-            <a:off x="4864608" y="2331720"/>
+            <a:off x="4442577" y="2284828"/>
             <a:ext cx="1554480" cy="566928"/>
           </a:xfrm>
           <a:prstGeom prst="rect">
@@ -3949,7 +3949,7 @@
         </p:nvSpPr>
         <p:spPr>
           <a:xfrm>
-            <a:off x="6995160" y="2432304"/>
+            <a:off x="6573129" y="2385412"/>
             <a:ext cx="1170432" cy="566928"/>
           </a:xfrm>
           <a:prstGeom prst="rect">
@@ -4001,7 +4001,7 @@
         </p:nvSpPr>
         <p:spPr>
           <a:xfrm>
-            <a:off x="2971800" y="2505456"/>
+            <a:off x="2549769" y="2458564"/>
             <a:ext cx="1234440" cy="329184"/>
           </a:xfrm>
           <a:prstGeom prst="rect">
@@ -4057,7 +4057,7 @@
         </p:nvSpPr>
         <p:spPr>
           <a:xfrm>
-            <a:off x="4864608" y="4224528"/>
+            <a:off x="4442577" y="4177636"/>
             <a:ext cx="969264" cy="164592"/>
           </a:xfrm>
           <a:prstGeom prst="rect">
@@ -4096,7 +4096,7 @@
         </p:nvSpPr>
         <p:spPr>
           <a:xfrm>
-            <a:off x="6007608" y="4224528"/>
+            <a:off x="5585577" y="4177636"/>
             <a:ext cx="969264" cy="164592"/>
           </a:xfrm>
           <a:prstGeom prst="rect">
@@ -4135,7 +4135,7 @@
         </p:nvSpPr>
         <p:spPr>
           <a:xfrm>
-            <a:off x="7150608" y="4224528"/>
+            <a:off x="6728577" y="4177636"/>
             <a:ext cx="969264" cy="164592"/>
           </a:xfrm>
           <a:prstGeom prst="rect">
@@ -4174,7 +4174,7 @@
         </p:nvSpPr>
         <p:spPr>
           <a:xfrm>
-            <a:off x="8613648" y="2613612"/>
+            <a:off x="8191617" y="2566720"/>
             <a:ext cx="914400" cy="310896"/>
           </a:xfrm>
           <a:prstGeom prst="rect">
@@ -4213,7 +4213,7 @@
         </p:nvSpPr>
         <p:spPr>
           <a:xfrm>
-            <a:off x="8613648" y="4096512"/>
+            <a:off x="8191617" y="4049620"/>
             <a:ext cx="914400" cy="310896"/>
           </a:xfrm>
           <a:prstGeom prst="rect">
@@ -4258,45 +4258,6 @@
               <a:t>Interface with data</a:t>
             </a:r>
             <a:endParaRPr lang="en-US" sz="650" dirty="0"/>
-          </a:p>
-        </p:txBody>
-      </p:sp>
-      <p:sp>
-        <p:nvSpPr>
-          <p:cNvPr id="222" name="Content"/>
-          <p:cNvSpPr txBox="1"/>
-          <p:nvPr/>
-        </p:nvSpPr>
-        <p:spPr>
-          <a:xfrm>
-            <a:off x="2788920" y="6140612"/>
-            <a:ext cx="868679" cy="159604"/>
-          </a:xfrm>
-          <a:prstGeom prst="rect">
-            <a:avLst/>
-          </a:prstGeom>
-          <a:noFill/>
-          <a:ln/>
-        </p:spPr>
-        <p:txBody>
-          <a:bodyPr wrap="square" lIns="508" tIns="508" rIns="508" bIns="508" rtlCol="0" anchor="ctr"/>
-          <a:lstStyle/>
-          <a:p>
-            <a:pPr marL="0" indent="0" algn="l">
-              <a:buNone/>
-            </a:pPr>
-            <a:r>
-              <a:rPr lang="en-US" sz="800" dirty="0">
-                <a:solidFill>
-                  <a:srgbClr val="3A3A3A"/>
-                </a:solidFill>
-                <a:latin typeface="Calibri" pitchFamily="34" charset="0"/>
-                <a:ea typeface="Calibri" pitchFamily="34" charset="-122"/>
-                <a:cs typeface="Calibri" pitchFamily="34" charset="-120"/>
-              </a:rPr>
-              <a:t>S3  ·  Object storage</a:t>
-            </a:r>
-            <a:endParaRPr lang="en-US" sz="800" dirty="0"/>
           </a:p>
         </p:txBody>
       </p:sp>
@@ -4308,8 +4269,8 @@
         </p:nvSpPr>
         <p:spPr>
           <a:xfrm>
-            <a:off x="4346666" y="6382512"/>
-            <a:ext cx="1142999" cy="194335"/>
+            <a:off x="4418445" y="6417969"/>
+            <a:ext cx="636678" cy="194335"/>
           </a:xfrm>
           <a:prstGeom prst="rect">
             <a:avLst/>
@@ -4353,7 +4314,7 @@
         </p:nvSpPr>
         <p:spPr>
           <a:xfrm>
-            <a:off x="2377440" y="1371600"/>
+            <a:off x="1955409" y="1324708"/>
             <a:ext cx="457200" cy="0"/>
           </a:xfrm>
           <a:prstGeom prst="line">
@@ -4390,8 +4351,8 @@
         </p:nvSpPr>
         <p:spPr>
           <a:xfrm>
-            <a:off x="4926149" y="6369184"/>
-            <a:ext cx="1535993" cy="212572"/>
+            <a:off x="5505006" y="6401883"/>
+            <a:ext cx="472822" cy="212572"/>
           </a:xfrm>
           <a:prstGeom prst="rect">
             <a:avLst/>
@@ -4435,8 +4396,8 @@
         </p:nvSpPr>
         <p:spPr>
           <a:xfrm>
-            <a:off x="5921781" y="6391001"/>
-            <a:ext cx="1535993" cy="212572"/>
+            <a:off x="6564427" y="6425162"/>
+            <a:ext cx="459234" cy="212572"/>
           </a:xfrm>
           <a:prstGeom prst="rect">
             <a:avLst/>
@@ -4480,7 +4441,7 @@
         </p:nvSpPr>
         <p:spPr>
           <a:xfrm>
-            <a:off x="6803136" y="6391001"/>
+            <a:off x="6399491" y="6415656"/>
             <a:ext cx="1535993" cy="212572"/>
           </a:xfrm>
           <a:prstGeom prst="rect">
@@ -4525,8 +4486,8 @@
         </p:nvSpPr>
         <p:spPr>
           <a:xfrm>
-            <a:off x="2971800" y="6355080"/>
-            <a:ext cx="1535993" cy="212572"/>
+            <a:off x="3351665" y="6410762"/>
+            <a:ext cx="387882" cy="226345"/>
           </a:xfrm>
           <a:prstGeom prst="rect">
             <a:avLst/>
@@ -4570,7 +4531,7 @@
         </p:nvSpPr>
         <p:spPr>
           <a:xfrm>
-            <a:off x="3040379" y="1144153"/>
+            <a:off x="2618348" y="1097261"/>
             <a:ext cx="1234440" cy="329184"/>
           </a:xfrm>
           <a:prstGeom prst="rect">
@@ -4631,7 +4592,7 @@
         </p:nvSpPr>
         <p:spPr>
           <a:xfrm>
-            <a:off x="4655149" y="1132112"/>
+            <a:off x="4233118" y="1085220"/>
             <a:ext cx="1234440" cy="329184"/>
           </a:xfrm>
           <a:prstGeom prst="rect">
@@ -4692,7 +4653,7 @@
         </p:nvSpPr>
         <p:spPr>
           <a:xfrm>
-            <a:off x="7737643" y="1134467"/>
+            <a:off x="7315612" y="1087575"/>
             <a:ext cx="1234440" cy="329184"/>
           </a:xfrm>
           <a:prstGeom prst="rect">
@@ -4753,7 +4714,7 @@
         </p:nvSpPr>
         <p:spPr>
           <a:xfrm>
-            <a:off x="6217920" y="1120833"/>
+            <a:off x="5795889" y="1073941"/>
             <a:ext cx="1234440" cy="329184"/>
           </a:xfrm>
           <a:prstGeom prst="rect">
@@ -4822,7 +4783,7 @@
         </p:blipFill>
         <p:spPr>
           <a:xfrm>
-            <a:off x="2007886" y="5825922"/>
+            <a:off x="1585855" y="5779030"/>
             <a:ext cx="342409" cy="342409"/>
           </a:xfrm>
           <a:prstGeom prst="rect">
@@ -4852,7 +4813,7 @@
         </p:blipFill>
         <p:spPr>
           <a:xfrm>
-            <a:off x="1567509" y="5850871"/>
+            <a:off x="1145478" y="5803979"/>
             <a:ext cx="358448" cy="358448"/>
           </a:xfrm>
           <a:prstGeom prst="rect">
@@ -4882,7 +4843,7 @@
         </p:blipFill>
         <p:spPr>
           <a:xfrm>
-            <a:off x="1088137" y="5851872"/>
+            <a:off x="666106" y="5804980"/>
             <a:ext cx="384048" cy="384048"/>
           </a:xfrm>
           <a:prstGeom prst="rect">
@@ -4904,7 +4865,7 @@
         </p:nvSpPr>
         <p:spPr>
           <a:xfrm>
-            <a:off x="932690" y="4921732"/>
+            <a:off x="510659" y="4874840"/>
             <a:ext cx="1536192" cy="411480"/>
           </a:xfrm>
           <a:prstGeom prst="rect">
@@ -4949,7 +4910,7 @@
         </p:nvSpPr>
         <p:spPr>
           <a:xfrm flipH="1">
-            <a:off x="1837944" y="4389121"/>
+            <a:off x="1415913" y="4342229"/>
             <a:ext cx="0" cy="475770"/>
           </a:xfrm>
           <a:prstGeom prst="line">
@@ -4986,7 +4947,7 @@
         </p:nvSpPr>
         <p:spPr>
           <a:xfrm>
-            <a:off x="1092996" y="5323780"/>
+            <a:off x="670965" y="5276888"/>
             <a:ext cx="1234440" cy="329184"/>
           </a:xfrm>
           <a:prstGeom prst="rect">
@@ -5045,7 +5006,7 @@
         </p:blipFill>
         <p:spPr>
           <a:xfrm>
-            <a:off x="1583511" y="1464549"/>
+            <a:off x="1161480" y="1417657"/>
             <a:ext cx="582017" cy="582017"/>
           </a:xfrm>
           <a:prstGeom prst="rect">
@@ -5075,7 +5036,7 @@
         </p:blipFill>
         <p:spPr>
           <a:xfrm>
-            <a:off x="1695094" y="2192249"/>
+            <a:off x="1273063" y="2145357"/>
             <a:ext cx="387317" cy="387317"/>
           </a:xfrm>
           <a:prstGeom prst="rect">
@@ -5105,7 +5066,7 @@
         </p:blipFill>
         <p:spPr>
           <a:xfrm>
-            <a:off x="1669853" y="2893584"/>
+            <a:off x="1247822" y="2846692"/>
             <a:ext cx="384951" cy="384951"/>
           </a:xfrm>
           <a:prstGeom prst="rect">
@@ -5135,7 +5096,7 @@
         </p:blipFill>
         <p:spPr>
           <a:xfrm>
-            <a:off x="1628122" y="3586859"/>
+            <a:off x="1206091" y="3539967"/>
             <a:ext cx="401358" cy="401358"/>
           </a:xfrm>
           <a:prstGeom prst="rect">
@@ -5165,7 +5126,7 @@
         </p:blipFill>
         <p:spPr>
           <a:xfrm>
-            <a:off x="9379850" y="6085330"/>
+            <a:off x="8957819" y="6038438"/>
             <a:ext cx="256031" cy="256031"/>
           </a:xfrm>
           <a:prstGeom prst="rect">
@@ -5187,7 +5148,7 @@
         </p:nvSpPr>
         <p:spPr>
           <a:xfrm flipV="1">
-            <a:off x="4846320" y="4825772"/>
+            <a:off x="4424289" y="4778880"/>
             <a:ext cx="0" cy="1234440"/>
           </a:xfrm>
           <a:prstGeom prst="line">
@@ -5224,7 +5185,7 @@
         </p:nvSpPr>
         <p:spPr>
           <a:xfrm flipV="1">
-            <a:off x="8966199" y="5003735"/>
+            <a:off x="8544168" y="4956843"/>
             <a:ext cx="14514" cy="493832"/>
           </a:xfrm>
           <a:prstGeom prst="line">
@@ -5261,7 +5222,7 @@
         </p:nvSpPr>
         <p:spPr>
           <a:xfrm flipH="1" flipV="1">
-            <a:off x="9189720" y="1147576"/>
+            <a:off x="8767689" y="1100684"/>
             <a:ext cx="1737360" cy="2820"/>
           </a:xfrm>
           <a:prstGeom prst="line">
@@ -5298,7 +5259,7 @@
         </p:nvSpPr>
         <p:spPr>
           <a:xfrm>
-            <a:off x="10995660" y="947928"/>
+            <a:off x="10573629" y="901036"/>
             <a:ext cx="1051560" cy="3989832"/>
           </a:xfrm>
           <a:prstGeom prst="roundRect">
@@ -5338,7 +5299,7 @@
         </p:nvSpPr>
         <p:spPr>
           <a:xfrm>
-            <a:off x="11027664" y="1684856"/>
+            <a:off x="10605633" y="1637964"/>
             <a:ext cx="996696" cy="365760"/>
           </a:xfrm>
           <a:prstGeom prst="rect">
@@ -5383,7 +5344,7 @@
         </p:nvSpPr>
         <p:spPr>
           <a:xfrm>
-            <a:off x="11182307" y="2837690"/>
+            <a:off x="10760276" y="2790798"/>
             <a:ext cx="731520" cy="0"/>
           </a:xfrm>
           <a:prstGeom prst="line">
@@ -5421,7 +5382,7 @@
         </p:nvSpPr>
         <p:spPr>
           <a:xfrm>
-            <a:off x="11027664" y="3383280"/>
+            <a:off x="10605633" y="3336388"/>
             <a:ext cx="996696" cy="365760"/>
           </a:xfrm>
           <a:prstGeom prst="rect">
@@ -5465,7 +5426,7 @@
         </p:nvSpPr>
         <p:spPr>
           <a:xfrm>
-            <a:off x="11081598" y="2001456"/>
+            <a:off x="10659567" y="1954564"/>
             <a:ext cx="914400" cy="310896"/>
           </a:xfrm>
           <a:prstGeom prst="rect">
@@ -5510,7 +5471,7 @@
         </p:nvSpPr>
         <p:spPr>
           <a:xfrm>
-            <a:off x="11075670" y="3742698"/>
+            <a:off x="10653639" y="3695806"/>
             <a:ext cx="914400" cy="310896"/>
           </a:xfrm>
           <a:prstGeom prst="rect">
@@ -5572,7 +5533,7 @@
         </p:nvSpPr>
         <p:spPr>
           <a:xfrm flipV="1">
-            <a:off x="2391729" y="5520663"/>
+            <a:off x="1969698" y="5473771"/>
             <a:ext cx="1265870" cy="2"/>
           </a:xfrm>
           <a:prstGeom prst="line">
@@ -5609,7 +5570,7 @@
         </p:nvSpPr>
         <p:spPr>
           <a:xfrm flipH="1">
-            <a:off x="3688341" y="4785935"/>
+            <a:off x="3266310" y="4739043"/>
             <a:ext cx="1" cy="748204"/>
           </a:xfrm>
           <a:prstGeom prst="line">
@@ -5645,7 +5606,7 @@
         </p:nvSpPr>
         <p:spPr>
           <a:xfrm flipH="1">
-            <a:off x="11405814" y="4988051"/>
+            <a:off x="10983783" y="4941159"/>
             <a:ext cx="1326" cy="250948"/>
           </a:xfrm>
           <a:prstGeom prst="line">
@@ -5682,7 +5643,7 @@
         </p:nvSpPr>
         <p:spPr>
           <a:xfrm flipH="1">
-            <a:off x="3657599" y="5202936"/>
+            <a:off x="3235568" y="5156044"/>
             <a:ext cx="7699248" cy="0"/>
           </a:xfrm>
           <a:prstGeom prst="line">
@@ -5718,7 +5679,7 @@
         </p:nvSpPr>
         <p:spPr>
           <a:xfrm>
-            <a:off x="4225909" y="3235039"/>
+            <a:off x="3803878" y="3188147"/>
             <a:ext cx="23879" cy="1956383"/>
           </a:xfrm>
           <a:prstGeom prst="line">
@@ -5748,7 +5709,7 @@
         </p:nvSpPr>
         <p:spPr>
           <a:xfrm>
-            <a:off x="2834640" y="3429000"/>
+            <a:off x="2412609" y="3382108"/>
             <a:ext cx="1645920" cy="1371600"/>
           </a:xfrm>
           <a:prstGeom prst="roundRect">
@@ -5782,7 +5743,7 @@
         </p:nvSpPr>
         <p:spPr>
           <a:xfrm>
-            <a:off x="2889504" y="3493008"/>
+            <a:off x="2467473" y="3446116"/>
             <a:ext cx="1536192" cy="411480"/>
           </a:xfrm>
           <a:prstGeom prst="rect">
@@ -5852,7 +5813,7 @@
         </p:blipFill>
         <p:spPr>
           <a:xfrm>
-            <a:off x="3877626" y="4479512"/>
+            <a:off x="3455595" y="4432620"/>
             <a:ext cx="569596" cy="299403"/>
           </a:xfrm>
           <a:prstGeom prst="rect">
@@ -5868,7 +5829,7 @@
         </p:nvSpPr>
         <p:spPr>
           <a:xfrm>
-            <a:off x="2971800" y="3986784"/>
+            <a:off x="2549769" y="3939892"/>
             <a:ext cx="1234440" cy="329184"/>
           </a:xfrm>
           <a:prstGeom prst="rect">
@@ -5930,7 +5891,7 @@
         </p:nvSpPr>
         <p:spPr>
           <a:xfrm flipV="1">
-            <a:off x="1836717" y="4364951"/>
+            <a:off x="1414686" y="4318059"/>
             <a:ext cx="1922" cy="375122"/>
           </a:xfrm>
           <a:prstGeom prst="line">
@@ -5953,6 +5914,168 @@
           </a:p>
         </p:txBody>
       </p:sp>
+      <p:pic>
+        <p:nvPicPr>
+          <p:cNvPr id="77" name="Graphic 76">
+            <a:extLst>
+              <a:ext uri="{FF2B5EF4-FFF2-40B4-BE49-F238E27FC236}">
+                <a16:creationId xmlns:a16="http://schemas.microsoft.com/office/drawing/2014/main" id="{EDC3E579-DA21-4915-C1BD-6FC532EE3012}"/>
+              </a:ext>
+            </a:extLst>
+          </p:cNvPr>
+          <p:cNvPicPr>
+            <a:picLocks noChangeAspect="1"/>
+          </p:cNvPicPr>
+          <p:nvPr/>
+        </p:nvPicPr>
+        <p:blipFill>
+          <a:blip>
+            <a:extLst>
+              <a:ext uri="{96DAC541-7B7A-43D3-8B79-37D633B846F1}">
+                <asvg:svgBlip xmlns:asvg="http://schemas.microsoft.com/office/drawing/2016/SVG/main" r:embed="rId22"/>
+              </a:ext>
+            </a:extLst>
+          </a:blip>
+          <a:stretch>
+            <a:fillRect/>
+          </a:stretch>
+        </p:blipFill>
+        <p:spPr>
+          <a:xfrm>
+            <a:off x="3406435" y="6100954"/>
+            <a:ext cx="372883" cy="372883"/>
+          </a:xfrm>
+          <a:prstGeom prst="rect">
+            <a:avLst/>
+          </a:prstGeom>
+        </p:spPr>
+      </p:pic>
+      <p:pic>
+        <p:nvPicPr>
+          <p:cNvPr id="126" name="Picture 125">
+            <a:extLst>
+              <a:ext uri="{FF2B5EF4-FFF2-40B4-BE49-F238E27FC236}">
+                <a16:creationId xmlns:a16="http://schemas.microsoft.com/office/drawing/2014/main" id="{1589701C-1333-3EC9-3E3A-AB33917839B5}"/>
+              </a:ext>
+            </a:extLst>
+          </p:cNvPr>
+          <p:cNvPicPr>
+            <a:picLocks noChangeAspect="1"/>
+          </p:cNvPicPr>
+          <p:nvPr/>
+        </p:nvPicPr>
+        <p:blipFill>
+          <a:blip r:embed="rId23"/>
+          <a:stretch>
+            <a:fillRect/>
+          </a:stretch>
+        </p:blipFill>
+        <p:spPr>
+          <a:xfrm>
+            <a:off x="4584309" y="6068184"/>
+            <a:ext cx="347848" cy="384048"/>
+          </a:xfrm>
+          <a:prstGeom prst="rect">
+            <a:avLst/>
+          </a:prstGeom>
+        </p:spPr>
+      </p:pic>
+      <p:pic>
+        <p:nvPicPr>
+          <p:cNvPr id="194" name="Graphic 193">
+            <a:extLst>
+              <a:ext uri="{FF2B5EF4-FFF2-40B4-BE49-F238E27FC236}">
+                <a16:creationId xmlns:a16="http://schemas.microsoft.com/office/drawing/2014/main" id="{ED54459B-5CBA-895F-B890-3CE71D3A7BD2}"/>
+              </a:ext>
+            </a:extLst>
+          </p:cNvPr>
+          <p:cNvPicPr>
+            <a:picLocks noChangeAspect="1"/>
+          </p:cNvPicPr>
+          <p:nvPr/>
+        </p:nvPicPr>
+        <p:blipFill>
+          <a:blip>
+            <a:extLst>
+              <a:ext uri="{96DAC541-7B7A-43D3-8B79-37D633B846F1}">
+                <asvg:svgBlip xmlns:asvg="http://schemas.microsoft.com/office/drawing/2016/SVG/main" r:embed="rId24"/>
+              </a:ext>
+            </a:extLst>
+          </a:blip>
+          <a:stretch>
+            <a:fillRect/>
+          </a:stretch>
+        </p:blipFill>
+        <p:spPr>
+          <a:xfrm>
+            <a:off x="5658729" y="6061299"/>
+            <a:ext cx="364814" cy="364814"/>
+          </a:xfrm>
+          <a:prstGeom prst="rect">
+            <a:avLst/>
+          </a:prstGeom>
+        </p:spPr>
+      </p:pic>
+      <p:pic>
+        <p:nvPicPr>
+          <p:cNvPr id="197" name="Picture 196">
+            <a:extLst>
+              <a:ext uri="{FF2B5EF4-FFF2-40B4-BE49-F238E27FC236}">
+                <a16:creationId xmlns:a16="http://schemas.microsoft.com/office/drawing/2014/main" id="{57C6417F-3360-365D-5F1E-15EF31F37BD9}"/>
+              </a:ext>
+            </a:extLst>
+          </p:cNvPr>
+          <p:cNvPicPr>
+            <a:picLocks noChangeAspect="1"/>
+          </p:cNvPicPr>
+          <p:nvPr/>
+        </p:nvPicPr>
+        <p:blipFill>
+          <a:blip r:embed="rId25"/>
+          <a:stretch>
+            <a:fillRect/>
+          </a:stretch>
+        </p:blipFill>
+        <p:spPr>
+          <a:xfrm>
+            <a:off x="6638115" y="6077223"/>
+            <a:ext cx="391010" cy="391010"/>
+          </a:xfrm>
+          <a:prstGeom prst="rect">
+            <a:avLst/>
+          </a:prstGeom>
+        </p:spPr>
+      </p:pic>
+      <p:pic>
+        <p:nvPicPr>
+          <p:cNvPr id="199" name="Picture 198">
+            <a:extLst>
+              <a:ext uri="{FF2B5EF4-FFF2-40B4-BE49-F238E27FC236}">
+                <a16:creationId xmlns:a16="http://schemas.microsoft.com/office/drawing/2014/main" id="{19A85495-0089-987C-91ED-FC1AFB7374CA}"/>
+              </a:ext>
+            </a:extLst>
+          </p:cNvPr>
+          <p:cNvPicPr>
+            <a:picLocks noChangeAspect="1"/>
+          </p:cNvPicPr>
+          <p:nvPr/>
+        </p:nvPicPr>
+        <p:blipFill>
+          <a:blip r:embed="rId26"/>
+          <a:stretch>
+            <a:fillRect/>
+          </a:stretch>
+        </p:blipFill>
+        <p:spPr>
+          <a:xfrm>
+            <a:off x="7460859" y="5951572"/>
+            <a:ext cx="632108" cy="632108"/>
+          </a:xfrm>
+          <a:prstGeom prst="rect">
+            <a:avLst/>
+          </a:prstGeom>
+        </p:spPr>
+      </p:pic>
     </p:spTree>
   </p:cSld>
   <p:clrMapOvr>
